--- a/Survey Data Analysis.pptx
+++ b/Survey Data Analysis.pptx
@@ -5066,7 +5066,7 @@
                   </a:extLst>
                 </a:hlinkClick>
               </a:rPr>
-              <a:t>https://github.com/GulamRasoolSiddiqui/Python-Project-for-Data-Science/blob/main/Current%20Technology%20Usage.pdf</a:t>
+              <a:t>https://github.com/GulamRasoolSiddiqui/Python-Project-for-Data-Science/blob/main/Survey%20Dashboard.pdf</a:t>
             </a:r>
             <a:endParaRPr kumimoji="0" lang="en-US" sz="2200" b="0" i="0" u="none" strike="noStrike" kern="1200" cap="none" spc="0" normalizeH="0" baseline="0" noProof="0" dirty="0">
               <a:ln>
